--- a/media/exports/reports/2026-08/growth-services.pptx
+++ b/media/exports/reports/2026-08/growth-services.pptx
@@ -243,73 +243,73 @@
                 <c:formatCode>$#,##0;[Red]($#,##0);"-"</c:formatCode>
                 <c:ptCount val="23"/>
                 <c:pt idx="0">
-                  <c:v>94520</c:v>
+                  <c:v>103550</c:v>
                 </c:pt>
                 <c:pt idx="1">
-                  <c:v>108140</c:v>
+                  <c:v>118390</c:v>
                 </c:pt>
                 <c:pt idx="2">
-                  <c:v>114895</c:v>
+                  <c:v>125715</c:v>
                 </c:pt>
                 <c:pt idx="3">
-                  <c:v>88250</c:v>
+                  <c:v>96560</c:v>
                 </c:pt>
                 <c:pt idx="4">
-                  <c:v>111010</c:v>
+                  <c:v>121275</c:v>
                 </c:pt>
                 <c:pt idx="5">
-                  <c:v>77175</c:v>
+                  <c:v>84340</c:v>
                 </c:pt>
                 <c:pt idx="6">
-                  <c:v>63970</c:v>
+                  <c:v>69985</c:v>
                 </c:pt>
                 <c:pt idx="7">
-                  <c:v>95555</c:v>
+                  <c:v>104970</c:v>
                 </c:pt>
                 <c:pt idx="8">
-                  <c:v>90220</c:v>
+                  <c:v>99060</c:v>
                 </c:pt>
                 <c:pt idx="9">
-                  <c:v>86320</c:v>
+                  <c:v>94805</c:v>
                 </c:pt>
                 <c:pt idx="10">
-                  <c:v>61475</c:v>
+                  <c:v>67745</c:v>
                 </c:pt>
                 <c:pt idx="11">
-                  <c:v>59535</c:v>
+                  <c:v>65650</c:v>
                 </c:pt>
                 <c:pt idx="12">
-                  <c:v>71260</c:v>
+                  <c:v>78550</c:v>
                 </c:pt>
                 <c:pt idx="13">
-                  <c:v>83940</c:v>
+                  <c:v>92575</c:v>
                 </c:pt>
                 <c:pt idx="14">
-                  <c:v>69420</c:v>
+                  <c:v>76600</c:v>
                 </c:pt>
                 <c:pt idx="15">
-                  <c:v>92370</c:v>
+                  <c:v>102350</c:v>
                 </c:pt>
                 <c:pt idx="16">
-                  <c:v>100055</c:v>
+                  <c:v>110835</c:v>
                 </c:pt>
                 <c:pt idx="17">
-                  <c:v>109865</c:v>
+                  <c:v>121215</c:v>
                 </c:pt>
                 <c:pt idx="18">
-                  <c:v>80590</c:v>
+                  <c:v>88665</c:v>
                 </c:pt>
                 <c:pt idx="19">
-                  <c:v>77090</c:v>
+                  <c:v>84920</c:v>
                 </c:pt>
                 <c:pt idx="20">
-                  <c:v>115550</c:v>
+                  <c:v>127580</c:v>
                 </c:pt>
                 <c:pt idx="21">
-                  <c:v>120755</c:v>
+                  <c:v>133455</c:v>
                 </c:pt>
                 <c:pt idx="22">
-                  <c:v>114640</c:v>
+                  <c:v>126500</c:v>
                 </c:pt>
               </c:numCache>
             </c:numRef>
@@ -393,7 +393,7 @@
         <c:crossAx val="-2101159928"/>
         <c:crosses val="autoZero"/>
         <c:crossBetween val="midCat"/>
-        <c:majorUnit val="25000.0"/>
+        <c:majorUnit val="50000.0"/>
       </c:valAx>
     </c:plotArea>
     <c:plotVisOnly val="1"/>
@@ -549,73 +549,73 @@
                 <c:formatCode>$#,##0;[Red]($#,##0);"-"</c:formatCode>
                 <c:ptCount val="23"/>
                 <c:pt idx="0">
-                  <c:v>70720</c:v>
+                  <c:v>77350</c:v>
                 </c:pt>
                 <c:pt idx="1">
-                  <c:v>88540</c:v>
+                  <c:v>96790</c:v>
                 </c:pt>
                 <c:pt idx="2">
-                  <c:v>94695</c:v>
+                  <c:v>103515</c:v>
                 </c:pt>
                 <c:pt idx="3">
-                  <c:v>66850</c:v>
+                  <c:v>73060</c:v>
                 </c:pt>
                 <c:pt idx="4">
-                  <c:v>84410</c:v>
+                  <c:v>92075</c:v>
                 </c:pt>
                 <c:pt idx="5">
-                  <c:v>48975</c:v>
+                  <c:v>53340</c:v>
                 </c:pt>
                 <c:pt idx="6">
-                  <c:v>37570</c:v>
+                  <c:v>40885</c:v>
                 </c:pt>
                 <c:pt idx="7">
-                  <c:v>59755</c:v>
+                  <c:v>65570</c:v>
                 </c:pt>
                 <c:pt idx="8">
-                  <c:v>64520</c:v>
+                  <c:v>70760</c:v>
                 </c:pt>
                 <c:pt idx="9">
-                  <c:v>64820</c:v>
+                  <c:v>71205</c:v>
                 </c:pt>
                 <c:pt idx="10">
-                  <c:v>38775</c:v>
+                  <c:v>42845</c:v>
                 </c:pt>
                 <c:pt idx="11">
-                  <c:v>38035</c:v>
+                  <c:v>42050</c:v>
                 </c:pt>
                 <c:pt idx="12">
-                  <c:v>45860</c:v>
+                  <c:v>50650</c:v>
                 </c:pt>
                 <c:pt idx="13">
-                  <c:v>46840</c:v>
+                  <c:v>51775</c:v>
                 </c:pt>
                 <c:pt idx="14">
-                  <c:v>29520</c:v>
+                  <c:v>32800</c:v>
                 </c:pt>
                 <c:pt idx="15">
-                  <c:v>60170</c:v>
+                  <c:v>66950</c:v>
                 </c:pt>
                 <c:pt idx="16">
-                  <c:v>62955</c:v>
+                  <c:v>70035</c:v>
                 </c:pt>
                 <c:pt idx="17">
-                  <c:v>75165</c:v>
+                  <c:v>83115</c:v>
                 </c:pt>
                 <c:pt idx="18">
-                  <c:v>47090</c:v>
+                  <c:v>51865</c:v>
                 </c:pt>
                 <c:pt idx="19">
-                  <c:v>43590</c:v>
+                  <c:v>48120</c:v>
                 </c:pt>
                 <c:pt idx="20">
-                  <c:v>76650</c:v>
+                  <c:v>84880</c:v>
                 </c:pt>
                 <c:pt idx="21">
-                  <c:v>79455</c:v>
+                  <c:v>88055</c:v>
                 </c:pt>
                 <c:pt idx="22">
-                  <c:v>75740</c:v>
+                  <c:v>83800</c:v>
                 </c:pt>
               </c:numCache>
             </c:numRef>
@@ -664,7 +664,7 @@
         <c:axId val="-2100718248"/>
         <c:scaling>
           <c:orientation val="minMax"/>
-          <c:max val="100000.0"/>
+          <c:max val="125000.0"/>
           <c:min val="0.0"/>
         </c:scaling>
         <c:delete val="0"/>
@@ -699,7 +699,7 @@
         <c:crossAx val="-2101159928"/>
         <c:crosses val="autoZero"/>
         <c:crossBetween val="midCat"/>
-        <c:majorUnit val="20000.0"/>
+        <c:majorUnit val="25000.0"/>
       </c:valAx>
     </c:plotArea>
     <c:plotVisOnly val="1"/>
@@ -855,73 +855,73 @@
                 <c:formatCode>$#,##0;[Red]($#,##0);"-"</c:formatCode>
                 <c:ptCount val="23"/>
                 <c:pt idx="0">
-                  <c:v>15000</c:v>
+                  <c:v>16500</c:v>
                 </c:pt>
                 <c:pt idx="1">
-                  <c:v>15000</c:v>
+                  <c:v>16500</c:v>
                 </c:pt>
                 <c:pt idx="2">
-                  <c:v>15000</c:v>
+                  <c:v>16500</c:v>
                 </c:pt>
                 <c:pt idx="3">
-                  <c:v>15000</c:v>
+                  <c:v>16500</c:v>
                 </c:pt>
                 <c:pt idx="4">
-                  <c:v>15000</c:v>
+                  <c:v>16500</c:v>
                 </c:pt>
                 <c:pt idx="5">
-                  <c:v>21800</c:v>
+                  <c:v>24000</c:v>
                 </c:pt>
                 <c:pt idx="6">
-                  <c:v>21800</c:v>
+                  <c:v>24000</c:v>
                 </c:pt>
                 <c:pt idx="7">
-                  <c:v>21800</c:v>
+                  <c:v>24000</c:v>
                 </c:pt>
                 <c:pt idx="8">
-                  <c:v>21800</c:v>
+                  <c:v>24000</c:v>
                 </c:pt>
                 <c:pt idx="9">
-                  <c:v>16300</c:v>
+                  <c:v>17900</c:v>
                 </c:pt>
                 <c:pt idx="10">
-                  <c:v>16300</c:v>
+                  <c:v>17900</c:v>
                 </c:pt>
                 <c:pt idx="11">
-                  <c:v>16300</c:v>
+                  <c:v>17900</c:v>
                 </c:pt>
                 <c:pt idx="12">
-                  <c:v>16300</c:v>
+                  <c:v>17900</c:v>
                 </c:pt>
                 <c:pt idx="13">
-                  <c:v>28300</c:v>
+                  <c:v>31100</c:v>
                 </c:pt>
                 <c:pt idx="14">
-                  <c:v>28300</c:v>
+                  <c:v>31100</c:v>
                 </c:pt>
                 <c:pt idx="15">
-                  <c:v>28300</c:v>
+                  <c:v>31100</c:v>
                 </c:pt>
                 <c:pt idx="16">
-                  <c:v>28300</c:v>
+                  <c:v>31100</c:v>
                 </c:pt>
                 <c:pt idx="17">
-                  <c:v>28300</c:v>
+                  <c:v>31100</c:v>
                 </c:pt>
                 <c:pt idx="18">
-                  <c:v>28300</c:v>
+                  <c:v>31100</c:v>
                 </c:pt>
                 <c:pt idx="19">
-                  <c:v>28300</c:v>
+                  <c:v>31100</c:v>
                 </c:pt>
                 <c:pt idx="20">
-                  <c:v>32500</c:v>
+                  <c:v>35700</c:v>
                 </c:pt>
                 <c:pt idx="21">
-                  <c:v>32500</c:v>
+                  <c:v>35700</c:v>
                 </c:pt>
                 <c:pt idx="22">
-                  <c:v>32500</c:v>
+                  <c:v>35700</c:v>
                 </c:pt>
               </c:numCache>
             </c:numRef>
@@ -1161,73 +1161,73 @@
                 <c:formatCode>$#,##0;[Red]($#,##0);"-"</c:formatCode>
                 <c:ptCount val="23"/>
                 <c:pt idx="0">
-                  <c:v>8800</c:v>
+                  <c:v>9700</c:v>
                 </c:pt>
                 <c:pt idx="1">
-                  <c:v>4600</c:v>
+                  <c:v>5100</c:v>
                 </c:pt>
                 <c:pt idx="2">
-                  <c:v>5200</c:v>
+                  <c:v>5700</c:v>
                 </c:pt>
                 <c:pt idx="3">
-                  <c:v>6400</c:v>
+                  <c:v>7000</c:v>
                 </c:pt>
                 <c:pt idx="4">
-                  <c:v>11600</c:v>
+                  <c:v>12700</c:v>
                 </c:pt>
                 <c:pt idx="5">
-                  <c:v>6400</c:v>
+                  <c:v>7000</c:v>
                 </c:pt>
                 <c:pt idx="6">
-                  <c:v>4600</c:v>
+                  <c:v>5100</c:v>
                 </c:pt>
                 <c:pt idx="7">
-                  <c:v>14000</c:v>
+                  <c:v>15400</c:v>
                 </c:pt>
                 <c:pt idx="8">
-                  <c:v>3900</c:v>
+                  <c:v>4300</c:v>
                 </c:pt>
                 <c:pt idx="9">
-                  <c:v>5200</c:v>
+                  <c:v>5700</c:v>
                 </c:pt>
                 <c:pt idx="10">
-                  <c:v>6400</c:v>
+                  <c:v>7000</c:v>
                 </c:pt>
                 <c:pt idx="11">
-                  <c:v>5200</c:v>
+                  <c:v>5700</c:v>
                 </c:pt>
                 <c:pt idx="12">
-                  <c:v>9100</c:v>
+                  <c:v>10000</c:v>
                 </c:pt>
                 <c:pt idx="13">
-                  <c:v>8800</c:v>
+                  <c:v>9700</c:v>
                 </c:pt>
                 <c:pt idx="14">
-                  <c:v>11600</c:v>
+                  <c:v>12700</c:v>
                 </c:pt>
                 <c:pt idx="15">
-                  <c:v>3900</c:v>
+                  <c:v>4300</c:v>
                 </c:pt>
                 <c:pt idx="16">
-                  <c:v>8800</c:v>
+                  <c:v>9700</c:v>
                 </c:pt>
                 <c:pt idx="17">
-                  <c:v>6400</c:v>
+                  <c:v>7000</c:v>
                 </c:pt>
                 <c:pt idx="18">
-                  <c:v>5200</c:v>
+                  <c:v>5700</c:v>
                 </c:pt>
                 <c:pt idx="19">
-                  <c:v>5200</c:v>
+                  <c:v>5700</c:v>
                 </c:pt>
                 <c:pt idx="20">
-                  <c:v>6400</c:v>
+                  <c:v>7000</c:v>
                 </c:pt>
                 <c:pt idx="21">
-                  <c:v>8800</c:v>
+                  <c:v>9700</c:v>
                 </c:pt>
                 <c:pt idx="22">
-                  <c:v>6400</c:v>
+                  <c:v>7000</c:v>
                 </c:pt>
               </c:numCache>
             </c:numRef>
@@ -1276,7 +1276,7 @@
         <c:axId val="-2100718248"/>
         <c:scaling>
           <c:orientation val="minMax"/>
-          <c:max val="15000.0"/>
+          <c:max val="20000.0"/>
           <c:min val="0.0"/>
         </c:scaling>
         <c:delete val="0"/>
@@ -1801,7 +1801,7 @@
           <a:lstStyle/>
           <a:p>
             <a:r>
-              <a:t>Services · All. August against August last year: 86.5%; Year to date against the same period last year: 59.3%; Gross margin, year to date: 59.9%. Revenue is 59.3% up on the same period last year, year to date ($235,395 against $147,795). Training makes the highest gross margin (68.4%); Projects the lowest (58.9%). The business needs 52.7% gross margin just to cover overheads. Projects: 58.9% gross margin, 18.9 points over the 40.0% target ($29,357 ahead on $155,195 this financial year to date). Training: 68.4% gross margin, 28.4 points over the 40.0% target ($4,320 ahead on $15,200 this financial year to date).</a:t>
+              <a:t>Services · All. August against August last year: 86.7%; Year to date against the same period last year: 59.9%; Gross margin, year to date: 63.7%. Revenue is 59.9% up on the same period last year, year to date ($259,955 against $162,550). Training makes the highest gross margin (71.3%); Projects the lowest (62.9%). The business needs 54.3% gross margin just to cover overheads. Projects: 62.9% gross margin, 22.9 points over the 40.0% target ($39,353 ahead on $171,855 this financial year to date). Training: 71.3% gross margin, 31.3 points over the 40.0% target ($5,220 ahead on $16,700 this financial year to date).</a:t>
             </a:r>
           </a:p>
         </p:txBody>
@@ -1871,7 +1871,7 @@
           <a:lstStyle/>
           <a:p>
             <a:r>
-              <a:t>Services · Projects. August against August last year: 95.3%; Year to date against the same period last year: 49.8%; Gross margin, year to date: 58.9%. Projects brought in $155,195 this financial year to date, 49.8% on the same period last year (slower than the business as a whole, 59.3%), at a 58.9% gross margin (below the 59.9% overall). Projects: 58.9% gross margin, 18.9 points over the 40.0% target ($29,357 ahead on $155,195 this financial year to date).</a:t>
+              <a:t>Services · Projects. August against August last year: 95.6%; Year to date against the same period last year: 50.7%; Gross margin, year to date: 62.9%. Projects brought in $171,855 this financial year to date, 50.7% on the same period last year (slower than the business as a whole, 59.9%), at a 62.9% gross margin (below the 63.7% overall). Projects: 62.9% gross margin, 22.9 points over the 40.0% target ($39,353 ahead on $171,855 this financial year to date).</a:t>
             </a:r>
           </a:p>
         </p:txBody>
@@ -1941,7 +1941,7 @@
           <a:lstStyle/>
           <a:p>
             <a:r>
-              <a:t>Services · Retainers. August against August last year: 99.4%; Year to date against the same period last year: 99.4%; Gross margin, year to date: 60.4%. Retainers brought in $65,000 this financial year to date, 99.4% on the same period last year (faster than the business as a whole, 59.3%), at a 60.4% gross margin (above the 59.9% overall). Retainers: 60.4% gross margin, 20.4 points over the 40.0% target ($13,260 ahead on $65,000 this financial year to date).</a:t>
+              <a:t>Services · Retainers. August against August last year: 99.4%; Year to date against the same period last year: 99.4%; Gross margin, year to date: 63.9%. Retainers brought in $71,400 this financial year to date, 99.4% on the same period last year (faster than the business as a whole, 59.9%), at a 63.9% gross margin (above the 63.7% overall). Retainers: 63.9% gross margin, 23.9 points over the 40.0% target ($17,100 ahead on $71,400 this financial year to date).</a:t>
             </a:r>
           </a:p>
         </p:txBody>
@@ -2011,7 +2011,7 @@
           <a:lstStyle/>
           <a:p>
             <a:r>
-              <a:t>Services · Training. August against August last year: 0.0%; Year to date against the same period last year: 31.0%; Gross margin, year to date: 68.4%. Training brought in $15,200 this financial year to date, 31.0% on the same period last year (slower than the business as a whole, 59.3%), at a 68.4% gross margin (above the 59.9% overall). Training: 68.4% gross margin, 28.4 points over the 40.0% target ($4,320 ahead on $15,200 this financial year to date).</a:t>
+              <a:t>Services · Training. August against August last year: 0.0%; Year to date against the same period last year: 31.5%; Gross margin, year to date: 71.3%. Training brought in $16,700 this financial year to date, 31.5% on the same period last year (slower than the business as a whole, 59.9%), at a 71.3% gross margin (above the 63.7% overall). Training: 71.3% gross margin, 31.3 points over the 40.0% target ($5,220 ahead on $16,700 this financial year to date).</a:t>
             </a:r>
           </a:p>
         </p:txBody>
@@ -2081,7 +2081,7 @@
           <a:lstStyle/>
           <a:p>
             <a:r>
-              <a:t>By type of work: financial year to date (Jul to Aug 2026) against the same period last year · Services. From gross margin to profit: August's client work made $68,020 gross margin (59.3%). Consultant time not charged to client work took $6,780 and overheads $53,650, leaving $7,590 profit before tax (6.6% of revenue). To cover overheads, client work needs a 52.7% gross margin on average.</a:t>
+              <a:t>By type of work: financial year to date (Jul to Aug 2026) against the same period last year · Services. From gross margin to profit: August's client work made $79,880 gross margin (63.1%). Consultant time not charged to client work took $15,000 and overheads $53,650, leaving $11,230 profit before tax (8.9% of revenue). To cover overheads, client work needs a 54.3% gross margin on average.</a:t>
             </a:r>
           </a:p>
         </p:txBody>
@@ -5496,7 +5496,7 @@
                 </a:solidFill>
                 <a:latin typeface="Roboto"/>
               </a:rPr>
-              <a:t>Data retrieved 2pm, Tue 6 Oct 2026 · Generated 8 Oct 2026, 9:35am · Sample data · Made with Python (python-pptx)</a:t>
+              <a:t>Data retrieved 2pm, Tue 6 Oct 2026 · Generated 9 Oct 2026, 8:41am · Sample data · Made with Python (python-pptx)</a:t>
             </a:r>
           </a:p>
         </p:txBody>
@@ -5842,7 +5842,7 @@
                 </a:solidFill>
                 <a:latin typeface="Roboto"/>
               </a:rPr>
-              <a:t>86.5%</a:t>
+              <a:t>86.7%</a:t>
             </a:r>
           </a:p>
         </p:txBody>
@@ -5881,7 +5881,7 @@
                 </a:solidFill>
                 <a:latin typeface="Roboto"/>
               </a:rPr>
-              <a:t>$114,640 against $61,475</a:t>
+              <a:t>$126,500 against $67,745</a:t>
             </a:r>
           </a:p>
         </p:txBody>
@@ -6008,7 +6008,7 @@
                 </a:solidFill>
                 <a:latin typeface="Roboto"/>
               </a:rPr>
-              <a:t>59.3%</a:t>
+              <a:t>59.9%</a:t>
             </a:r>
           </a:p>
         </p:txBody>
@@ -6047,7 +6047,7 @@
                 </a:solidFill>
                 <a:latin typeface="Roboto"/>
               </a:rPr>
-              <a:t>$235,395 against $147,795</a:t>
+              <a:t>$259,955 against $162,550</a:t>
             </a:r>
           </a:p>
         </p:txBody>
@@ -6174,7 +6174,7 @@
                 </a:solidFill>
                 <a:latin typeface="Roboto"/>
               </a:rPr>
-              <a:t>59.9%</a:t>
+              <a:t>63.7%</a:t>
             </a:r>
           </a:p>
         </p:txBody>
@@ -6213,7 +6213,7 @@
                 </a:solidFill>
                 <a:latin typeface="Roboto"/>
               </a:rPr>
-              <a:t>$141,095 before overheads</a:t>
+              <a:t>$165,655 before overheads</a:t>
             </a:r>
           </a:p>
         </p:txBody>
@@ -6358,7 +6358,7 @@
                 </a:solidFill>
                 <a:latin typeface="Roboto"/>
               </a:rPr>
-              <a:t>Revenue is 59.3% up on the same period last year, year to date ($235,395 against $147,795). Training makes the highest gross margin (68.4%); Projects the lowest (58.9%). The business needs 52.7% gross margin just to cover overheads.</a:t>
+              <a:t>Revenue is 59.9% up on the same period last year, year to date ($259,955 against $162,550). Training makes the highest gross margin (71.3%); Projects the lowest (62.9%). The business needs 54.3% gross margin just to cover overheads.</a:t>
             </a:r>
           </a:p>
         </p:txBody>
@@ -6485,7 +6485,7 @@
                 </a:solidFill>
                 <a:latin typeface="Roboto"/>
               </a:rPr>
-              <a:t>Projects: 58.9% gross margin, 18.9 points over the 40.0% target ($29,357 ahead on $155,195 this financial year to date). Training: 68.4% gross margin, 28.4 points over the 40.0% target ($4,320 ahead on $15,200 this financial year to date).</a:t>
+              <a:t>Projects: 62.9% gross margin, 22.9 points over the 40.0% target ($39,353 ahead on $171,855 this financial year to date). Training: 71.3% gross margin, 31.3 points over the 40.0% target ($5,220 ahead on $16,700 this financial year to date).</a:t>
             </a:r>
           </a:p>
         </p:txBody>
@@ -6563,7 +6563,7 @@
                 </a:solidFill>
                 <a:latin typeface="Roboto"/>
               </a:rPr>
-              <a:t>Data retrieved 2pm, Tue 6 Oct 2026 · Generated 8 Oct 2026, 9:35am · Sample data · Made with Python (python-pptx)</a:t>
+              <a:t>Data retrieved 2pm, Tue 6 Oct 2026 · Generated 9 Oct 2026, 8:41am · Sample data · Made with Python (python-pptx)</a:t>
             </a:r>
           </a:p>
         </p:txBody>
@@ -6909,7 +6909,7 @@
                 </a:solidFill>
                 <a:latin typeface="Roboto"/>
               </a:rPr>
-              <a:t>95.3%</a:t>
+              <a:t>95.6%</a:t>
             </a:r>
           </a:p>
         </p:txBody>
@@ -6948,7 +6948,7 @@
                 </a:solidFill>
                 <a:latin typeface="Roboto"/>
               </a:rPr>
-              <a:t>$75,740 against $38,775</a:t>
+              <a:t>$83,800 against $42,845</a:t>
             </a:r>
           </a:p>
         </p:txBody>
@@ -7075,7 +7075,7 @@
                 </a:solidFill>
                 <a:latin typeface="Roboto"/>
               </a:rPr>
-              <a:t>49.8%</a:t>
+              <a:t>50.7%</a:t>
             </a:r>
           </a:p>
         </p:txBody>
@@ -7114,7 +7114,7 @@
                 </a:solidFill>
                 <a:latin typeface="Roboto"/>
               </a:rPr>
-              <a:t>$155,195 against $103,595</a:t>
+              <a:t>$171,855 against $114,050</a:t>
             </a:r>
           </a:p>
         </p:txBody>
@@ -7241,7 +7241,7 @@
                 </a:solidFill>
                 <a:latin typeface="Roboto"/>
               </a:rPr>
-              <a:t>58.9%</a:t>
+              <a:t>62.9%</a:t>
             </a:r>
           </a:p>
         </p:txBody>
@@ -7280,7 +7280,7 @@
                 </a:solidFill>
                 <a:latin typeface="Roboto"/>
               </a:rPr>
-              <a:t>$91,435 before overheads</a:t>
+              <a:t>$108,095 before overheads</a:t>
             </a:r>
           </a:p>
         </p:txBody>
@@ -7425,7 +7425,7 @@
                 </a:solidFill>
                 <a:latin typeface="Roboto"/>
               </a:rPr>
-              <a:t>Projects brought in $155,195 this financial year to date, 49.8% on the same period last year (slower than the business as a whole, 59.3%), at a 58.9% gross margin (below the 59.9% overall).</a:t>
+              <a:t>Projects brought in $171,855 this financial year to date, 50.7% on the same period last year (slower than the business as a whole, 59.9%), at a 62.9% gross margin (below the 63.7% overall).</a:t>
             </a:r>
           </a:p>
         </p:txBody>
@@ -7552,7 +7552,7 @@
                 </a:solidFill>
                 <a:latin typeface="Roboto"/>
               </a:rPr>
-              <a:t>Projects: 58.9% gross margin, 18.9 points over the 40.0% target ($29,357 ahead on $155,195 this financial year to date).</a:t>
+              <a:t>Projects: 62.9% gross margin, 22.9 points over the 40.0% target ($39,353 ahead on $171,855 this financial year to date).</a:t>
             </a:r>
           </a:p>
         </p:txBody>
@@ -7630,7 +7630,7 @@
                 </a:solidFill>
                 <a:latin typeface="Roboto"/>
               </a:rPr>
-              <a:t>Data retrieved 2pm, Tue 6 Oct 2026 · Generated 8 Oct 2026, 9:35am · Sample data · Made with Python (python-pptx)</a:t>
+              <a:t>Data retrieved 2pm, Tue 6 Oct 2026 · Generated 9 Oct 2026, 8:41am · Sample data · Made with Python (python-pptx)</a:t>
             </a:r>
           </a:p>
         </p:txBody>
@@ -8015,7 +8015,7 @@
                 </a:solidFill>
                 <a:latin typeface="Roboto"/>
               </a:rPr>
-              <a:t>$32,500 against $16,300</a:t>
+              <a:t>$35,700 against $17,900</a:t>
             </a:r>
           </a:p>
         </p:txBody>
@@ -8181,7 +8181,7 @@
                 </a:solidFill>
                 <a:latin typeface="Roboto"/>
               </a:rPr>
-              <a:t>$65,000 against $32,600</a:t>
+              <a:t>$71,400 against $35,800</a:t>
             </a:r>
           </a:p>
         </p:txBody>
@@ -8308,7 +8308,7 @@
                 </a:solidFill>
                 <a:latin typeface="Roboto"/>
               </a:rPr>
-              <a:t>60.4%</a:t>
+              <a:t>63.9%</a:t>
             </a:r>
           </a:p>
         </p:txBody>
@@ -8347,7 +8347,7 @@
                 </a:solidFill>
                 <a:latin typeface="Roboto"/>
               </a:rPr>
-              <a:t>$39,260 before overheads</a:t>
+              <a:t>$45,660 before overheads</a:t>
             </a:r>
           </a:p>
         </p:txBody>
@@ -8492,7 +8492,7 @@
                 </a:solidFill>
                 <a:latin typeface="Roboto"/>
               </a:rPr>
-              <a:t>Retainers brought in $65,000 this financial year to date, 99.4% on the same period last year (faster than the business as a whole, 59.3%), at a 60.4% gross margin (above the 59.9% overall).</a:t>
+              <a:t>Retainers brought in $71,400 this financial year to date, 99.4% on the same period last year (faster than the business as a whole, 59.9%), at a 63.9% gross margin (above the 63.7% overall).</a:t>
             </a:r>
           </a:p>
         </p:txBody>
@@ -8619,7 +8619,7 @@
                 </a:solidFill>
                 <a:latin typeface="Roboto"/>
               </a:rPr>
-              <a:t>Retainers: 60.4% gross margin, 20.4 points over the 40.0% target ($13,260 ahead on $65,000 this financial year to date).</a:t>
+              <a:t>Retainers: 63.9% gross margin, 23.9 points over the 40.0% target ($17,100 ahead on $71,400 this financial year to date).</a:t>
             </a:r>
           </a:p>
         </p:txBody>
@@ -8697,7 +8697,7 @@
                 </a:solidFill>
                 <a:latin typeface="Roboto"/>
               </a:rPr>
-              <a:t>Data retrieved 2pm, Tue 6 Oct 2026 · Generated 8 Oct 2026, 9:35am · Sample data · Made with Python (python-pptx)</a:t>
+              <a:t>Data retrieved 2pm, Tue 6 Oct 2026 · Generated 9 Oct 2026, 8:41am · Sample data · Made with Python (python-pptx)</a:t>
             </a:r>
           </a:p>
         </p:txBody>
@@ -9082,7 +9082,7 @@
                 </a:solidFill>
                 <a:latin typeface="Roboto"/>
               </a:rPr>
-              <a:t>$6,400 against $6,400</a:t>
+              <a:t>$7,000 against $7,000</a:t>
             </a:r>
           </a:p>
         </p:txBody>
@@ -9209,7 +9209,7 @@
                 </a:solidFill>
                 <a:latin typeface="Roboto"/>
               </a:rPr>
-              <a:t>31.0%</a:t>
+              <a:t>31.5%</a:t>
             </a:r>
           </a:p>
         </p:txBody>
@@ -9248,7 +9248,7 @@
                 </a:solidFill>
                 <a:latin typeface="Roboto"/>
               </a:rPr>
-              <a:t>$15,200 against $11,600</a:t>
+              <a:t>$16,700 against $12,700</a:t>
             </a:r>
           </a:p>
         </p:txBody>
@@ -9375,7 +9375,7 @@
                 </a:solidFill>
                 <a:latin typeface="Roboto"/>
               </a:rPr>
-              <a:t>68.4%</a:t>
+              <a:t>71.3%</a:t>
             </a:r>
           </a:p>
         </p:txBody>
@@ -9414,7 +9414,7 @@
                 </a:solidFill>
                 <a:latin typeface="Roboto"/>
               </a:rPr>
-              <a:t>$10,400 before overheads</a:t>
+              <a:t>$11,900 before overheads</a:t>
             </a:r>
           </a:p>
         </p:txBody>
@@ -9559,7 +9559,7 @@
                 </a:solidFill>
                 <a:latin typeface="Roboto"/>
               </a:rPr>
-              <a:t>Training brought in $15,200 this financial year to date, 31.0% on the same period last year (slower than the business as a whole, 59.3%), at a 68.4% gross margin (above the 59.9% overall).</a:t>
+              <a:t>Training brought in $16,700 this financial year to date, 31.5% on the same period last year (slower than the business as a whole, 59.9%), at a 71.3% gross margin (above the 63.7% overall).</a:t>
             </a:r>
           </a:p>
         </p:txBody>
@@ -9686,7 +9686,7 @@
                 </a:solidFill>
                 <a:latin typeface="Roboto"/>
               </a:rPr>
-              <a:t>Training: 68.4% gross margin, 28.4 points over the 40.0% target ($4,320 ahead on $15,200 this financial year to date).</a:t>
+              <a:t>Training: 71.3% gross margin, 31.3 points over the 40.0% target ($5,220 ahead on $16,700 this financial year to date).</a:t>
             </a:r>
           </a:p>
         </p:txBody>
@@ -9764,7 +9764,7 @@
                 </a:solidFill>
                 <a:latin typeface="Roboto"/>
               </a:rPr>
-              <a:t>Data retrieved 2pm, Tue 6 Oct 2026 · Generated 8 Oct 2026, 9:35am · Sample data · Made with Python (python-pptx)</a:t>
+              <a:t>Data retrieved 2pm, Tue 6 Oct 2026 · Generated 9 Oct 2026, 8:41am · Sample data · Made with Python (python-pptx)</a:t>
             </a:r>
           </a:p>
         </p:txBody>
@@ -9983,7 +9983,7 @@
                 </a:solidFill>
                 <a:latin typeface="Roboto"/>
               </a:rPr>
-              <a:t>From gross margin to profit: August's client work made $68,020 gross margin (59.3%). Consultant time not charged to client work took $6,780 and overheads $53,650, leaving $7,590 profit before tax (6.6% of revenue). To cover overheads, client work needs a 52.7% gross margin on average.</a:t>
+              <a:t>From gross margin to profit: August's client work made $79,880 gross margin (63.1%). Consultant time not charged to client work took $15,000 and overheads $53,650, leaving $11,230 profit before tax (8.9% of revenue). To cover overheads, client work needs a 54.3% gross margin on average.</a:t>
             </a:r>
           </a:p>
         </p:txBody>
@@ -10214,7 +10214,7 @@
                           </a:solidFill>
                           <a:latin typeface="Roboto"/>
                         </a:rPr>
-                        <a:t>$155,195</a:t>
+                        <a:t>$171,855</a:t>
                       </a:r>
                     </a:p>
                   </a:txBody>
@@ -10241,7 +10241,7 @@
                           </a:solidFill>
                           <a:latin typeface="Roboto"/>
                         </a:rPr>
-                        <a:t>$103,595</a:t>
+                        <a:t>$114,050</a:t>
                       </a:r>
                     </a:p>
                   </a:txBody>
@@ -10268,7 +10268,7 @@
                           </a:solidFill>
                           <a:latin typeface="Roboto"/>
                         </a:rPr>
-                        <a:t>49.8%</a:t>
+                        <a:t>50.7%</a:t>
                       </a:r>
                     </a:p>
                   </a:txBody>
@@ -10295,7 +10295,7 @@
                           </a:solidFill>
                           <a:latin typeface="Roboto"/>
                         </a:rPr>
-                        <a:t>$91,435</a:t>
+                        <a:t>$108,095</a:t>
                       </a:r>
                     </a:p>
                   </a:txBody>
@@ -10322,7 +10322,7 @@
                           </a:solidFill>
                           <a:latin typeface="Roboto"/>
                         </a:rPr>
-                        <a:t>58.9%</a:t>
+                        <a:t>62.9%</a:t>
                       </a:r>
                     </a:p>
                   </a:txBody>
@@ -10378,7 +10378,7 @@
                           </a:solidFill>
                           <a:latin typeface="Roboto"/>
                         </a:rPr>
-                        <a:t>$65,000</a:t>
+                        <a:t>$71,400</a:t>
                       </a:r>
                     </a:p>
                   </a:txBody>
@@ -10405,7 +10405,7 @@
                           </a:solidFill>
                           <a:latin typeface="Roboto"/>
                         </a:rPr>
-                        <a:t>$32,600</a:t>
+                        <a:t>$35,800</a:t>
                       </a:r>
                     </a:p>
                   </a:txBody>
@@ -10459,7 +10459,7 @@
                           </a:solidFill>
                           <a:latin typeface="Roboto"/>
                         </a:rPr>
-                        <a:t>$39,260</a:t>
+                        <a:t>$45,660</a:t>
                       </a:r>
                     </a:p>
                   </a:txBody>
@@ -10486,7 +10486,7 @@
                           </a:solidFill>
                           <a:latin typeface="Roboto"/>
                         </a:rPr>
-                        <a:t>60.4%</a:t>
+                        <a:t>63.9%</a:t>
                       </a:r>
                     </a:p>
                   </a:txBody>
@@ -10542,7 +10542,7 @@
                           </a:solidFill>
                           <a:latin typeface="Roboto"/>
                         </a:rPr>
-                        <a:t>$15,200</a:t>
+                        <a:t>$16,700</a:t>
                       </a:r>
                     </a:p>
                   </a:txBody>
@@ -10569,7 +10569,7 @@
                           </a:solidFill>
                           <a:latin typeface="Roboto"/>
                         </a:rPr>
-                        <a:t>$11,600</a:t>
+                        <a:t>$12,700</a:t>
                       </a:r>
                     </a:p>
                   </a:txBody>
@@ -10596,7 +10596,7 @@
                           </a:solidFill>
                           <a:latin typeface="Roboto"/>
                         </a:rPr>
-                        <a:t>31.0%</a:t>
+                        <a:t>31.5%</a:t>
                       </a:r>
                     </a:p>
                   </a:txBody>
@@ -10623,7 +10623,7 @@
                           </a:solidFill>
                           <a:latin typeface="Roboto"/>
                         </a:rPr>
-                        <a:t>$10,400</a:t>
+                        <a:t>$11,900</a:t>
                       </a:r>
                     </a:p>
                   </a:txBody>
@@ -10650,7 +10650,7 @@
                           </a:solidFill>
                           <a:latin typeface="Roboto"/>
                         </a:rPr>
-                        <a:t>68.4%</a:t>
+                        <a:t>71.3%</a:t>
                       </a:r>
                     </a:p>
                   </a:txBody>
@@ -10706,7 +10706,7 @@
                           </a:solidFill>
                           <a:latin typeface="Roboto"/>
                         </a:rPr>
-                        <a:t>$235,395</a:t>
+                        <a:t>$259,955</a:t>
                       </a:r>
                     </a:p>
                   </a:txBody>
@@ -10733,61 +10733,7 @@
                           </a:solidFill>
                           <a:latin typeface="Roboto"/>
                         </a:rPr>
-                        <a:t>$147,795</a:t>
-                      </a:r>
-                    </a:p>
-                  </a:txBody>
-                  <a:tcPr>
-                    <a:solidFill>
-                      <a:srgbClr val="F7FAF7"/>
-                    </a:solidFill>
-                  </a:tcPr>
-                </a:tc>
-                <a:tc>
-                  <a:txBody>
-                    <a:bodyPr/>
-                    <a:lstStyle/>
-                    <a:p>
-                      <a:pPr algn="r">
-                        <a:defRPr>
-                          <a:latin typeface="Roboto"/>
-                        </a:defRPr>
-                      </a:pPr>
-                      <a:r>
-                        <a:rPr sz="1050" b="1">
-                          <a:solidFill>
-                            <a:srgbClr val="25342A"/>
-                          </a:solidFill>
-                          <a:latin typeface="Roboto"/>
-                        </a:rPr>
-                        <a:t>59.3%</a:t>
-                      </a:r>
-                    </a:p>
-                  </a:txBody>
-                  <a:tcPr>
-                    <a:solidFill>
-                      <a:srgbClr val="F7FAF7"/>
-                    </a:solidFill>
-                  </a:tcPr>
-                </a:tc>
-                <a:tc>
-                  <a:txBody>
-                    <a:bodyPr/>
-                    <a:lstStyle/>
-                    <a:p>
-                      <a:pPr algn="r">
-                        <a:defRPr>
-                          <a:latin typeface="Roboto"/>
-                        </a:defRPr>
-                      </a:pPr>
-                      <a:r>
-                        <a:rPr sz="1050" b="1">
-                          <a:solidFill>
-                            <a:srgbClr val="25342A"/>
-                          </a:solidFill>
-                          <a:latin typeface="Roboto"/>
-                        </a:rPr>
-                        <a:t>$141,095</a:t>
+                        <a:t>$162,550</a:t>
                       </a:r>
                     </a:p>
                   </a:txBody>
@@ -10824,6 +10770,60 @@
                     </a:solidFill>
                   </a:tcPr>
                 </a:tc>
+                <a:tc>
+                  <a:txBody>
+                    <a:bodyPr/>
+                    <a:lstStyle/>
+                    <a:p>
+                      <a:pPr algn="r">
+                        <a:defRPr>
+                          <a:latin typeface="Roboto"/>
+                        </a:defRPr>
+                      </a:pPr>
+                      <a:r>
+                        <a:rPr sz="1050" b="1">
+                          <a:solidFill>
+                            <a:srgbClr val="25342A"/>
+                          </a:solidFill>
+                          <a:latin typeface="Roboto"/>
+                        </a:rPr>
+                        <a:t>$165,655</a:t>
+                      </a:r>
+                    </a:p>
+                  </a:txBody>
+                  <a:tcPr>
+                    <a:solidFill>
+                      <a:srgbClr val="F7FAF7"/>
+                    </a:solidFill>
+                  </a:tcPr>
+                </a:tc>
+                <a:tc>
+                  <a:txBody>
+                    <a:bodyPr/>
+                    <a:lstStyle/>
+                    <a:p>
+                      <a:pPr algn="r">
+                        <a:defRPr>
+                          <a:latin typeface="Roboto"/>
+                        </a:defRPr>
+                      </a:pPr>
+                      <a:r>
+                        <a:rPr sz="1050" b="1">
+                          <a:solidFill>
+                            <a:srgbClr val="25342A"/>
+                          </a:solidFill>
+                          <a:latin typeface="Roboto"/>
+                        </a:rPr>
+                        <a:t>63.7%</a:t>
+                      </a:r>
+                    </a:p>
+                  </a:txBody>
+                  <a:tcPr>
+                    <a:solidFill>
+                      <a:srgbClr val="F7FAF7"/>
+                    </a:solidFill>
+                  </a:tcPr>
+                </a:tc>
               </a:tr>
             </a:tbl>
           </a:graphicData>
@@ -10902,7 +10902,7 @@
                 </a:solidFill>
                 <a:latin typeface="Roboto"/>
               </a:rPr>
-              <a:t>Data retrieved 2pm, Tue 6 Oct 2026 · Generated 8 Oct 2026, 9:35am · Sample data · Made with Python (python-pptx)</a:t>
+              <a:t>Data retrieved 2pm, Tue 6 Oct 2026 · Generated 9 Oct 2026, 8:41am · Sample data · Made with Python (python-pptx)</a:t>
             </a:r>
           </a:p>
         </p:txBody>
